--- a/assets/pptx/catalog-355.pptx
+++ b/assets/pptx/catalog-355.pptx
@@ -4273,7 +4273,7 @@
                 <a:ea typeface="Ebrima"/>
                 <a:cs typeface="Ebrima"/>
               </a:rPr>
-              <a:t>እርሱ እግዚአብሔር ነው (2x)</a:t>
+              <a:t>እርሱ እግዚአብሔር ነው 2x</a:t>
             </a:r>
           </a:p>
           <a:p>
@@ -4376,7 +4376,7 @@
                 <a:ea typeface="Ebrima"/>
                 <a:cs typeface="Ebrima"/>
               </a:rPr>
-              <a:t>እግዚአብሔር ነው ብርቱና ኃያል (2x)</a:t>
+              <a:t>እግዚአብሔር ነው ብርቱና ኃያል 2x</a:t>
             </a:r>
           </a:p>
           <a:p>
@@ -4412,7 +4412,7 @@
                 <a:ea typeface="Ebrima"/>
                 <a:cs typeface="Ebrima"/>
               </a:rPr>
-              <a:t>እግዚአብሔር ነው ብርቱና ኃያል (2x)</a:t>
+              <a:t>እግዚአብሔር ነው ብርቱና ኃያል 2x</a:t>
             </a:r>
           </a:p>
         </p:txBody>
